--- a/assets/pptx/catalog-448.pptx
+++ b/assets/pptx/catalog-448.pptx
@@ -3474,7 +3474,7 @@
                 <a:ea typeface="Ebrima"/>
                 <a:cs typeface="Ebrima"/>
               </a:rPr>
-              <a:t>ኢየሱስ ሲጠራኝ እርሱን ተከተልኩኝ (2x)</a:t>
+              <a:t>ኢየሱስ ሲጠራኝ እርሱን ተከተልኩኝ 2x</a:t>
             </a:r>
           </a:p>
           <a:p>
@@ -3492,7 +3492,7 @@
                 <a:ea typeface="Ebrima"/>
                 <a:cs typeface="Ebrima"/>
               </a:rPr>
-              <a:t>በጣም ረጅም መንገድ ተጉዤ መጣሁኝ (2x)</a:t>
+              <a:t>በጣም ረጅም መንገድ ተጉዤ መጣሁኝ 2x</a:t>
             </a:r>
           </a:p>
         </p:txBody>
@@ -3765,7 +3765,7 @@
                 <a:ea typeface="Ebrima"/>
                 <a:cs typeface="Ebrima"/>
               </a:rPr>
-              <a:t>ለእኔ እንደ ኢየሱስ ማን ይሆንልኛል (2x)</a:t>
+              <a:t>ለእኔ እንደ ኢየሱስ ማን ይሆንልኛል 2x</a:t>
             </a:r>
           </a:p>
           <a:p>
@@ -3783,7 +3783,7 @@
                 <a:ea typeface="Ebrima"/>
                 <a:cs typeface="Ebrima"/>
               </a:rPr>
-              <a:t>በዓለም ካለው ነገር ሁሉ በልጦብኛል (2x)</a:t>
+              <a:t>በዓለም ካለው ነገር ሁሉ በልጦብኛል 2x</a:t>
             </a:r>
           </a:p>
         </p:txBody>
@@ -3935,7 +3935,7 @@
                 <a:ea typeface="Ebrima"/>
                 <a:cs typeface="Ebrima"/>
               </a:rPr>
-              <a:t>የመኖር ትርጉሙ ፍጹም ግራ ገብቶኝ (2x)</a:t>
+              <a:t>የመኖር ትርጉሙ ፍጹም ግራ ገብቶኝ 2x</a:t>
             </a:r>
           </a:p>
           <a:p>
@@ -3953,7 +3953,7 @@
                 <a:ea typeface="Ebrima"/>
                 <a:cs typeface="Ebrima"/>
               </a:rPr>
-              <a:t>ሌት ተቀን ስጨነቅ የማደርገው ጠፍቶኝ (2x)</a:t>
+              <a:t>ሌት ተቀን ስጨነቅ የማደርገው ጠፍቶኝ 2x</a:t>
             </a:r>
           </a:p>
           <a:p>
